--- a/plots/adjusted_meld3_nohisp.pptx
+++ b/plots/adjusted_meld3_nohisp.pptx
@@ -2951,528 +2951,528 @@
           </p:nvSpPr>
           <p:spPr>
             <a:xfrm>
-              <a:off x="1019512" y="3714130"/>
-              <a:ext cx="7591371" cy="1350765"/>
+              <a:off x="1019512" y="3223122"/>
+              <a:ext cx="7591371" cy="1841772"/>
             </a:xfrm>
             <a:custGeom>
               <a:avLst/>
               <a:pathLst>
-                <a:path w="7591371" h="1350765">
+                <a:path w="7591371" h="1841772">
                   <a:moveTo>
-                    <a:pt x="0" y="1350765"/>
+                    <a:pt x="0" y="1841772"/>
                   </a:moveTo>
                   <a:lnTo>
-                    <a:pt x="84348" y="1350765"/>
-                  </a:lnTo>
-                  <a:lnTo>
-                    <a:pt x="84348" y="1325335"/>
-                  </a:lnTo>
-                  <a:lnTo>
-                    <a:pt x="168697" y="1325335"/>
-                  </a:lnTo>
-                  <a:lnTo>
-                    <a:pt x="168697" y="1299885"/>
-                  </a:lnTo>
-                  <a:lnTo>
-                    <a:pt x="253045" y="1299885"/>
-                  </a:lnTo>
-                  <a:lnTo>
-                    <a:pt x="253045" y="1274331"/>
-                  </a:lnTo>
-                  <a:lnTo>
-                    <a:pt x="337394" y="1274331"/>
-                  </a:lnTo>
-                  <a:lnTo>
-                    <a:pt x="337394" y="1261434"/>
-                  </a:lnTo>
-                  <a:lnTo>
-                    <a:pt x="421742" y="1261434"/>
-                  </a:lnTo>
-                  <a:lnTo>
-                    <a:pt x="421742" y="1235699"/>
-                  </a:lnTo>
-                  <a:lnTo>
-                    <a:pt x="506091" y="1235699"/>
-                  </a:lnTo>
-                  <a:lnTo>
-                    <a:pt x="506091" y="1209971"/>
-                  </a:lnTo>
-                  <a:lnTo>
-                    <a:pt x="590440" y="1209971"/>
-                  </a:lnTo>
-                  <a:lnTo>
-                    <a:pt x="590440" y="1171437"/>
-                  </a:lnTo>
-                  <a:lnTo>
-                    <a:pt x="674788" y="1171437"/>
-                  </a:lnTo>
-                  <a:lnTo>
-                    <a:pt x="674788" y="1158462"/>
-                  </a:lnTo>
-                  <a:lnTo>
-                    <a:pt x="759137" y="1158462"/>
-                  </a:lnTo>
-                  <a:lnTo>
-                    <a:pt x="759137" y="1094214"/>
-                  </a:lnTo>
-                  <a:lnTo>
-                    <a:pt x="843485" y="1094214"/>
-                  </a:lnTo>
-                  <a:lnTo>
-                    <a:pt x="843485" y="1055146"/>
-                  </a:lnTo>
-                  <a:lnTo>
-                    <a:pt x="927834" y="1055146"/>
-                  </a:lnTo>
-                  <a:lnTo>
-                    <a:pt x="927834" y="1002950"/>
-                  </a:lnTo>
-                  <a:lnTo>
-                    <a:pt x="1012182" y="1002950"/>
-                  </a:lnTo>
-                  <a:lnTo>
-                    <a:pt x="1012182" y="912115"/>
-                  </a:lnTo>
-                  <a:lnTo>
-                    <a:pt x="1096531" y="912115"/>
-                  </a:lnTo>
-                  <a:lnTo>
-                    <a:pt x="1096531" y="872095"/>
-                  </a:lnTo>
-                  <a:lnTo>
-                    <a:pt x="1180880" y="872095"/>
-                  </a:lnTo>
-                  <a:lnTo>
-                    <a:pt x="1180880" y="845067"/>
-                  </a:lnTo>
-                  <a:lnTo>
-                    <a:pt x="1265228" y="845067"/>
-                  </a:lnTo>
-                  <a:lnTo>
-                    <a:pt x="1265228" y="804690"/>
-                  </a:lnTo>
-                  <a:lnTo>
-                    <a:pt x="1349577" y="804690"/>
-                  </a:lnTo>
-                  <a:lnTo>
-                    <a:pt x="1349577" y="777446"/>
-                  </a:lnTo>
-                  <a:lnTo>
-                    <a:pt x="1433925" y="777446"/>
-                  </a:lnTo>
-                  <a:lnTo>
-                    <a:pt x="1433925" y="750137"/>
-                  </a:lnTo>
-                  <a:lnTo>
-                    <a:pt x="1518274" y="750137"/>
-                  </a:lnTo>
-                  <a:lnTo>
-                    <a:pt x="1518274" y="695741"/>
-                  </a:lnTo>
-                  <a:lnTo>
-                    <a:pt x="1602622" y="695741"/>
-                  </a:lnTo>
-                  <a:lnTo>
-                    <a:pt x="1602622" y="681950"/>
-                  </a:lnTo>
-                  <a:lnTo>
-                    <a:pt x="1686971" y="681950"/>
-                  </a:lnTo>
-                  <a:lnTo>
-                    <a:pt x="1686971" y="668174"/>
-                  </a:lnTo>
-                  <a:lnTo>
-                    <a:pt x="1771320" y="668174"/>
-                  </a:lnTo>
-                  <a:lnTo>
-                    <a:pt x="1771320" y="668174"/>
-                  </a:lnTo>
-                  <a:lnTo>
-                    <a:pt x="1855668" y="668174"/>
-                  </a:lnTo>
-                  <a:lnTo>
-                    <a:pt x="1855668" y="612708"/>
-                  </a:lnTo>
-                  <a:lnTo>
-                    <a:pt x="1940017" y="612708"/>
-                  </a:lnTo>
-                  <a:lnTo>
-                    <a:pt x="1940017" y="612708"/>
-                  </a:lnTo>
-                  <a:lnTo>
-                    <a:pt x="2024365" y="612708"/>
-                  </a:lnTo>
-                  <a:lnTo>
-                    <a:pt x="2024365" y="598726"/>
-                  </a:lnTo>
-                  <a:lnTo>
-                    <a:pt x="2108714" y="598726"/>
-                  </a:lnTo>
-                  <a:lnTo>
-                    <a:pt x="2108714" y="570818"/>
-                  </a:lnTo>
-                  <a:lnTo>
-                    <a:pt x="2193062" y="570818"/>
-                  </a:lnTo>
-                  <a:lnTo>
-                    <a:pt x="2193062" y="515432"/>
-                  </a:lnTo>
-                  <a:lnTo>
-                    <a:pt x="2277411" y="515432"/>
-                  </a:lnTo>
-                  <a:lnTo>
-                    <a:pt x="2277411" y="501344"/>
-                  </a:lnTo>
-                  <a:lnTo>
-                    <a:pt x="2361760" y="501344"/>
-                  </a:lnTo>
-                  <a:lnTo>
-                    <a:pt x="2361760" y="445272"/>
-                  </a:lnTo>
-                  <a:lnTo>
-                    <a:pt x="2446108" y="445272"/>
-                  </a:lnTo>
-                  <a:lnTo>
-                    <a:pt x="2446108" y="402933"/>
-                  </a:lnTo>
-                  <a:lnTo>
-                    <a:pt x="2530457" y="402933"/>
-                  </a:lnTo>
-                  <a:lnTo>
-                    <a:pt x="2530457" y="360576"/>
-                  </a:lnTo>
-                  <a:lnTo>
-                    <a:pt x="2614805" y="360576"/>
-                  </a:lnTo>
-                  <a:lnTo>
-                    <a:pt x="2614805" y="346268"/>
-                  </a:lnTo>
-                  <a:lnTo>
-                    <a:pt x="2699154" y="346268"/>
-                  </a:lnTo>
-                  <a:lnTo>
-                    <a:pt x="2699154" y="346268"/>
-                  </a:lnTo>
-                  <a:lnTo>
-                    <a:pt x="2783503" y="346268"/>
-                  </a:lnTo>
-                  <a:lnTo>
-                    <a:pt x="2783503" y="346268"/>
-                  </a:lnTo>
-                  <a:lnTo>
-                    <a:pt x="2867851" y="346268"/>
-                  </a:lnTo>
-                  <a:lnTo>
-                    <a:pt x="2867851" y="303644"/>
-                  </a:lnTo>
-                  <a:lnTo>
-                    <a:pt x="2952200" y="303644"/>
-                  </a:lnTo>
-                  <a:lnTo>
-                    <a:pt x="2952200" y="275049"/>
-                  </a:lnTo>
-                  <a:lnTo>
-                    <a:pt x="3036548" y="275049"/>
-                  </a:lnTo>
-                  <a:lnTo>
-                    <a:pt x="3036548" y="275049"/>
-                  </a:lnTo>
-                  <a:lnTo>
-                    <a:pt x="3120897" y="275049"/>
-                  </a:lnTo>
-                  <a:lnTo>
-                    <a:pt x="3120897" y="260728"/>
-                  </a:lnTo>
-                  <a:lnTo>
-                    <a:pt x="3205245" y="260728"/>
-                  </a:lnTo>
-                  <a:lnTo>
-                    <a:pt x="3205245" y="246410"/>
-                  </a:lnTo>
-                  <a:lnTo>
-                    <a:pt x="3289594" y="246410"/>
-                  </a:lnTo>
-                  <a:lnTo>
-                    <a:pt x="3289594" y="246410"/>
-                  </a:lnTo>
-                  <a:lnTo>
-                    <a:pt x="3373943" y="246410"/>
-                  </a:lnTo>
-                  <a:lnTo>
-                    <a:pt x="3373943" y="246410"/>
-                  </a:lnTo>
-                  <a:lnTo>
-                    <a:pt x="3458291" y="246410"/>
-                  </a:lnTo>
-                  <a:lnTo>
-                    <a:pt x="3458291" y="246410"/>
-                  </a:lnTo>
-                  <a:lnTo>
-                    <a:pt x="3542640" y="246410"/>
-                  </a:lnTo>
-                  <a:lnTo>
-                    <a:pt x="3542640" y="246410"/>
-                  </a:lnTo>
-                  <a:lnTo>
-                    <a:pt x="3626988" y="246410"/>
-                  </a:lnTo>
-                  <a:lnTo>
-                    <a:pt x="3626988" y="246410"/>
-                  </a:lnTo>
-                  <a:lnTo>
-                    <a:pt x="3711337" y="246410"/>
-                  </a:lnTo>
-                  <a:lnTo>
-                    <a:pt x="3711337" y="246410"/>
-                  </a:lnTo>
-                  <a:lnTo>
-                    <a:pt x="3795685" y="246410"/>
-                  </a:lnTo>
-                  <a:lnTo>
-                    <a:pt x="3795685" y="232088"/>
-                  </a:lnTo>
-                  <a:lnTo>
-                    <a:pt x="3880034" y="232088"/>
-                  </a:lnTo>
-                  <a:lnTo>
-                    <a:pt x="3880034" y="232088"/>
-                  </a:lnTo>
-                  <a:lnTo>
-                    <a:pt x="3964383" y="232088"/>
-                  </a:lnTo>
-                  <a:lnTo>
-                    <a:pt x="3964383" y="217753"/>
-                  </a:lnTo>
-                  <a:lnTo>
-                    <a:pt x="4048731" y="217753"/>
-                  </a:lnTo>
-                  <a:lnTo>
-                    <a:pt x="4048731" y="203397"/>
-                  </a:lnTo>
-                  <a:lnTo>
-                    <a:pt x="4133080" y="203397"/>
-                  </a:lnTo>
-                  <a:lnTo>
-                    <a:pt x="4133080" y="174837"/>
-                  </a:lnTo>
-                  <a:lnTo>
-                    <a:pt x="4217428" y="174837"/>
-                  </a:lnTo>
-                  <a:lnTo>
-                    <a:pt x="4217428" y="174837"/>
-                  </a:lnTo>
-                  <a:lnTo>
-                    <a:pt x="4301777" y="174837"/>
-                  </a:lnTo>
-                  <a:lnTo>
-                    <a:pt x="4301777" y="174837"/>
-                  </a:lnTo>
-                  <a:lnTo>
-                    <a:pt x="4386125" y="174837"/>
-                  </a:lnTo>
-                  <a:lnTo>
-                    <a:pt x="4386125" y="160432"/>
-                  </a:lnTo>
-                  <a:lnTo>
-                    <a:pt x="4470474" y="160432"/>
-                  </a:lnTo>
-                  <a:lnTo>
-                    <a:pt x="4470474" y="160432"/>
-                  </a:lnTo>
-                  <a:lnTo>
-                    <a:pt x="4554823" y="160432"/>
-                  </a:lnTo>
-                  <a:lnTo>
-                    <a:pt x="4554823" y="146019"/>
-                  </a:lnTo>
-                  <a:lnTo>
-                    <a:pt x="4639171" y="146019"/>
-                  </a:lnTo>
-                  <a:lnTo>
-                    <a:pt x="4639171" y="146019"/>
-                  </a:lnTo>
-                  <a:lnTo>
-                    <a:pt x="4723520" y="146019"/>
-                  </a:lnTo>
-                  <a:lnTo>
-                    <a:pt x="4723520" y="146019"/>
-                  </a:lnTo>
-                  <a:lnTo>
-                    <a:pt x="4807868" y="146019"/>
-                  </a:lnTo>
-                  <a:lnTo>
-                    <a:pt x="4807868" y="146019"/>
-                  </a:lnTo>
-                  <a:lnTo>
-                    <a:pt x="4892217" y="146019"/>
-                  </a:lnTo>
-                  <a:lnTo>
-                    <a:pt x="4892217" y="146019"/>
-                  </a:lnTo>
-                  <a:lnTo>
-                    <a:pt x="4976565" y="146019"/>
-                  </a:lnTo>
-                  <a:lnTo>
-                    <a:pt x="4976565" y="131576"/>
-                  </a:lnTo>
-                  <a:lnTo>
-                    <a:pt x="5060914" y="131576"/>
-                  </a:lnTo>
-                  <a:lnTo>
-                    <a:pt x="5060914" y="102809"/>
-                  </a:lnTo>
-                  <a:lnTo>
-                    <a:pt x="5145263" y="102809"/>
-                  </a:lnTo>
-                  <a:lnTo>
-                    <a:pt x="5145263" y="102809"/>
-                  </a:lnTo>
-                  <a:lnTo>
-                    <a:pt x="5229611" y="102809"/>
-                  </a:lnTo>
-                  <a:lnTo>
-                    <a:pt x="5229611" y="102809"/>
-                  </a:lnTo>
-                  <a:lnTo>
-                    <a:pt x="5313960" y="102809"/>
-                  </a:lnTo>
-                  <a:lnTo>
-                    <a:pt x="5313960" y="102809"/>
-                  </a:lnTo>
-                  <a:lnTo>
-                    <a:pt x="5398308" y="102809"/>
-                  </a:lnTo>
-                  <a:lnTo>
-                    <a:pt x="5398308" y="88365"/>
-                  </a:lnTo>
-                  <a:lnTo>
-                    <a:pt x="5482657" y="88365"/>
-                  </a:lnTo>
-                  <a:lnTo>
-                    <a:pt x="5482657" y="73941"/>
-                  </a:lnTo>
-                  <a:lnTo>
-                    <a:pt x="5567006" y="73941"/>
-                  </a:lnTo>
-                  <a:lnTo>
-                    <a:pt x="5567006" y="73941"/>
-                  </a:lnTo>
-                  <a:lnTo>
-                    <a:pt x="5651354" y="73941"/>
-                  </a:lnTo>
-                  <a:lnTo>
-                    <a:pt x="5651354" y="73941"/>
-                  </a:lnTo>
-                  <a:lnTo>
-                    <a:pt x="5735703" y="73941"/>
-                  </a:lnTo>
-                  <a:lnTo>
-                    <a:pt x="5735703" y="59439"/>
-                  </a:lnTo>
-                  <a:lnTo>
-                    <a:pt x="5820051" y="59439"/>
-                  </a:lnTo>
-                  <a:lnTo>
-                    <a:pt x="5820051" y="59439"/>
-                  </a:lnTo>
-                  <a:lnTo>
-                    <a:pt x="5904400" y="59439"/>
-                  </a:lnTo>
-                  <a:lnTo>
-                    <a:pt x="5904400" y="59439"/>
-                  </a:lnTo>
-                  <a:lnTo>
-                    <a:pt x="5988748" y="59439"/>
-                  </a:lnTo>
-                  <a:lnTo>
-                    <a:pt x="5988748" y="59439"/>
-                  </a:lnTo>
-                  <a:lnTo>
-                    <a:pt x="6073097" y="59439"/>
-                  </a:lnTo>
-                  <a:lnTo>
-                    <a:pt x="6073097" y="59439"/>
-                  </a:lnTo>
-                  <a:lnTo>
-                    <a:pt x="6157446" y="59439"/>
-                  </a:lnTo>
-                  <a:lnTo>
-                    <a:pt x="6157446" y="29844"/>
-                  </a:lnTo>
-                  <a:lnTo>
-                    <a:pt x="6241794" y="29844"/>
-                  </a:lnTo>
-                  <a:lnTo>
-                    <a:pt x="6241794" y="29844"/>
-                  </a:lnTo>
-                  <a:lnTo>
-                    <a:pt x="6326143" y="29844"/>
-                  </a:lnTo>
-                  <a:lnTo>
-                    <a:pt x="6326143" y="29844"/>
-                  </a:lnTo>
-                  <a:lnTo>
-                    <a:pt x="6410491" y="29844"/>
-                  </a:lnTo>
-                  <a:lnTo>
-                    <a:pt x="6410491" y="29844"/>
-                  </a:lnTo>
-                  <a:lnTo>
-                    <a:pt x="6494840" y="29844"/>
-                  </a:lnTo>
-                  <a:lnTo>
-                    <a:pt x="6494840" y="29844"/>
-                  </a:lnTo>
-                  <a:lnTo>
-                    <a:pt x="6579188" y="29844"/>
-                  </a:lnTo>
-                  <a:lnTo>
-                    <a:pt x="6579188" y="29844"/>
-                  </a:lnTo>
-                  <a:lnTo>
-                    <a:pt x="6663537" y="29844"/>
-                  </a:lnTo>
-                  <a:lnTo>
-                    <a:pt x="6663537" y="29844"/>
-                  </a:lnTo>
-                  <a:lnTo>
-                    <a:pt x="6747886" y="29844"/>
-                  </a:lnTo>
-                  <a:lnTo>
-                    <a:pt x="6747886" y="14918"/>
-                  </a:lnTo>
-                  <a:lnTo>
-                    <a:pt x="6832234" y="14918"/>
-                  </a:lnTo>
-                  <a:lnTo>
-                    <a:pt x="6832234" y="14918"/>
-                  </a:lnTo>
-                  <a:lnTo>
-                    <a:pt x="6916583" y="14918"/>
-                  </a:lnTo>
-                  <a:lnTo>
-                    <a:pt x="6916583" y="14918"/>
-                  </a:lnTo>
-                  <a:lnTo>
-                    <a:pt x="7000931" y="14918"/>
-                  </a:lnTo>
-                  <a:lnTo>
-                    <a:pt x="7000931" y="14918"/>
-                  </a:lnTo>
-                  <a:lnTo>
-                    <a:pt x="7085280" y="14918"/>
-                  </a:lnTo>
-                  <a:lnTo>
-                    <a:pt x="7085280" y="14918"/>
-                  </a:lnTo>
-                  <a:lnTo>
-                    <a:pt x="7169628" y="14918"/>
-                  </a:lnTo>
-                  <a:lnTo>
-                    <a:pt x="7169628" y="14918"/>
-                  </a:lnTo>
-                  <a:lnTo>
-                    <a:pt x="7253977" y="14918"/>
+                    <a:pt x="84348" y="1841772"/>
+                  </a:lnTo>
+                  <a:lnTo>
+                    <a:pt x="84348" y="1802499"/>
+                  </a:lnTo>
+                  <a:lnTo>
+                    <a:pt x="168697" y="1802499"/>
+                  </a:lnTo>
+                  <a:lnTo>
+                    <a:pt x="168697" y="1763359"/>
+                  </a:lnTo>
+                  <a:lnTo>
+                    <a:pt x="253045" y="1763359"/>
+                  </a:lnTo>
+                  <a:lnTo>
+                    <a:pt x="253045" y="1724227"/>
+                  </a:lnTo>
+                  <a:lnTo>
+                    <a:pt x="337394" y="1724227"/>
+                  </a:lnTo>
+                  <a:lnTo>
+                    <a:pt x="337394" y="1704540"/>
+                  </a:lnTo>
+                  <a:lnTo>
+                    <a:pt x="421742" y="1704540"/>
+                  </a:lnTo>
+                  <a:lnTo>
+                    <a:pt x="421742" y="1665385"/>
+                  </a:lnTo>
+                  <a:lnTo>
+                    <a:pt x="506091" y="1665385"/>
+                  </a:lnTo>
+                  <a:lnTo>
+                    <a:pt x="506091" y="1626410"/>
+                  </a:lnTo>
+                  <a:lnTo>
+                    <a:pt x="590440" y="1626410"/>
+                  </a:lnTo>
+                  <a:lnTo>
+                    <a:pt x="590440" y="1568359"/>
+                  </a:lnTo>
+                  <a:lnTo>
+                    <a:pt x="674788" y="1568359"/>
+                  </a:lnTo>
+                  <a:lnTo>
+                    <a:pt x="674788" y="1548900"/>
+                  </a:lnTo>
+                  <a:lnTo>
+                    <a:pt x="759137" y="1548900"/>
+                  </a:lnTo>
+                  <a:lnTo>
+                    <a:pt x="759137" y="1453191"/>
+                  </a:lnTo>
+                  <a:lnTo>
+                    <a:pt x="843485" y="1453191"/>
+                  </a:lnTo>
+                  <a:lnTo>
+                    <a:pt x="843485" y="1395524"/>
+                  </a:lnTo>
+                  <a:lnTo>
+                    <a:pt x="927834" y="1395524"/>
+                  </a:lnTo>
+                  <a:lnTo>
+                    <a:pt x="927834" y="1319111"/>
+                  </a:lnTo>
+                  <a:lnTo>
+                    <a:pt x="1012182" y="1319111"/>
+                  </a:lnTo>
+                  <a:lnTo>
+                    <a:pt x="1012182" y="1187870"/>
+                  </a:lnTo>
+                  <a:lnTo>
+                    <a:pt x="1096531" y="1187870"/>
+                  </a:lnTo>
+                  <a:lnTo>
+                    <a:pt x="1096531" y="1130756"/>
+                  </a:lnTo>
+                  <a:lnTo>
+                    <a:pt x="1180880" y="1130756"/>
+                  </a:lnTo>
+                  <a:lnTo>
+                    <a:pt x="1180880" y="1092430"/>
+                  </a:lnTo>
+                  <a:lnTo>
+                    <a:pt x="1265228" y="1092430"/>
+                  </a:lnTo>
+                  <a:lnTo>
+                    <a:pt x="1265228" y="1035548"/>
+                  </a:lnTo>
+                  <a:lnTo>
+                    <a:pt x="1349577" y="1035548"/>
+                  </a:lnTo>
+                  <a:lnTo>
+                    <a:pt x="1349577" y="997422"/>
+                  </a:lnTo>
+                  <a:lnTo>
+                    <a:pt x="1433925" y="997422"/>
+                  </a:lnTo>
+                  <a:lnTo>
+                    <a:pt x="1433925" y="959409"/>
+                  </a:lnTo>
+                  <a:lnTo>
+                    <a:pt x="1518274" y="959409"/>
+                  </a:lnTo>
+                  <a:lnTo>
+                    <a:pt x="1518274" y="884316"/>
+                  </a:lnTo>
+                  <a:lnTo>
+                    <a:pt x="1602622" y="884316"/>
+                  </a:lnTo>
+                  <a:lnTo>
+                    <a:pt x="1602622" y="865408"/>
+                  </a:lnTo>
+                  <a:lnTo>
+                    <a:pt x="1686971" y="865408"/>
+                  </a:lnTo>
+                  <a:lnTo>
+                    <a:pt x="1686971" y="846574"/>
+                  </a:lnTo>
+                  <a:lnTo>
+                    <a:pt x="1771320" y="846574"/>
+                  </a:lnTo>
+                  <a:lnTo>
+                    <a:pt x="1771320" y="846574"/>
+                  </a:lnTo>
+                  <a:lnTo>
+                    <a:pt x="1855668" y="846574"/>
+                  </a:lnTo>
+                  <a:lnTo>
+                    <a:pt x="1855668" y="771290"/>
+                  </a:lnTo>
+                  <a:lnTo>
+                    <a:pt x="1940017" y="771290"/>
+                  </a:lnTo>
+                  <a:lnTo>
+                    <a:pt x="1940017" y="771290"/>
+                  </a:lnTo>
+                  <a:lnTo>
+                    <a:pt x="2024365" y="771290"/>
+                  </a:lnTo>
+                  <a:lnTo>
+                    <a:pt x="2024365" y="752450"/>
+                  </a:lnTo>
+                  <a:lnTo>
+                    <a:pt x="2108714" y="752450"/>
+                  </a:lnTo>
+                  <a:lnTo>
+                    <a:pt x="2108714" y="715013"/>
+                  </a:lnTo>
+                  <a:lnTo>
+                    <a:pt x="2193062" y="715013"/>
+                  </a:lnTo>
+                  <a:lnTo>
+                    <a:pt x="2193062" y="641376"/>
+                  </a:lnTo>
+                  <a:lnTo>
+                    <a:pt x="2277411" y="641376"/>
+                  </a:lnTo>
+                  <a:lnTo>
+                    <a:pt x="2277411" y="622788"/>
+                  </a:lnTo>
+                  <a:lnTo>
+                    <a:pt x="2361760" y="622788"/>
+                  </a:lnTo>
+                  <a:lnTo>
+                    <a:pt x="2361760" y="549375"/>
+                  </a:lnTo>
+                  <a:lnTo>
+                    <a:pt x="2446108" y="549375"/>
+                  </a:lnTo>
+                  <a:lnTo>
+                    <a:pt x="2446108" y="494554"/>
+                  </a:lnTo>
+                  <a:lnTo>
+                    <a:pt x="2530457" y="494554"/>
+                  </a:lnTo>
+                  <a:lnTo>
+                    <a:pt x="2530457" y="440238"/>
+                  </a:lnTo>
+                  <a:lnTo>
+                    <a:pt x="2614805" y="440238"/>
+                  </a:lnTo>
+                  <a:lnTo>
+                    <a:pt x="2614805" y="422012"/>
+                  </a:lnTo>
+                  <a:lnTo>
+                    <a:pt x="2699154" y="422012"/>
+                  </a:lnTo>
+                  <a:lnTo>
+                    <a:pt x="2699154" y="422012"/>
+                  </a:lnTo>
+                  <a:lnTo>
+                    <a:pt x="2783503" y="422012"/>
+                  </a:lnTo>
+                  <a:lnTo>
+                    <a:pt x="2783503" y="422012"/>
+                  </a:lnTo>
+                  <a:lnTo>
+                    <a:pt x="2867851" y="422012"/>
+                  </a:lnTo>
+                  <a:lnTo>
+                    <a:pt x="2867851" y="368078"/>
+                  </a:lnTo>
+                  <a:lnTo>
+                    <a:pt x="2952200" y="368078"/>
+                  </a:lnTo>
+                  <a:lnTo>
+                    <a:pt x="2952200" y="332203"/>
+                  </a:lnTo>
+                  <a:lnTo>
+                    <a:pt x="3036548" y="332203"/>
+                  </a:lnTo>
+                  <a:lnTo>
+                    <a:pt x="3036548" y="332203"/>
+                  </a:lnTo>
+                  <a:lnTo>
+                    <a:pt x="3120897" y="332203"/>
+                  </a:lnTo>
+                  <a:lnTo>
+                    <a:pt x="3120897" y="314328"/>
+                  </a:lnTo>
+                  <a:lnTo>
+                    <a:pt x="3205245" y="314328"/>
+                  </a:lnTo>
+                  <a:lnTo>
+                    <a:pt x="3205245" y="296519"/>
+                  </a:lnTo>
+                  <a:lnTo>
+                    <a:pt x="3289594" y="296519"/>
+                  </a:lnTo>
+                  <a:lnTo>
+                    <a:pt x="3289594" y="296519"/>
+                  </a:lnTo>
+                  <a:lnTo>
+                    <a:pt x="3373943" y="296519"/>
+                  </a:lnTo>
+                  <a:lnTo>
+                    <a:pt x="3373943" y="296519"/>
+                  </a:lnTo>
+                  <a:lnTo>
+                    <a:pt x="3458291" y="296519"/>
+                  </a:lnTo>
+                  <a:lnTo>
+                    <a:pt x="3458291" y="296519"/>
+                  </a:lnTo>
+                  <a:lnTo>
+                    <a:pt x="3542640" y="296519"/>
+                  </a:lnTo>
+                  <a:lnTo>
+                    <a:pt x="3542640" y="296519"/>
+                  </a:lnTo>
+                  <a:lnTo>
+                    <a:pt x="3626988" y="296519"/>
+                  </a:lnTo>
+                  <a:lnTo>
+                    <a:pt x="3626988" y="296519"/>
+                  </a:lnTo>
+                  <a:lnTo>
+                    <a:pt x="3711337" y="296519"/>
+                  </a:lnTo>
+                  <a:lnTo>
+                    <a:pt x="3711337" y="296519"/>
+                  </a:lnTo>
+                  <a:lnTo>
+                    <a:pt x="3795685" y="296519"/>
+                  </a:lnTo>
+                  <a:lnTo>
+                    <a:pt x="3795685" y="278769"/>
+                  </a:lnTo>
+                  <a:lnTo>
+                    <a:pt x="3880034" y="278769"/>
+                  </a:lnTo>
+                  <a:lnTo>
+                    <a:pt x="3880034" y="278769"/>
+                  </a:lnTo>
+                  <a:lnTo>
+                    <a:pt x="3964383" y="278769"/>
+                  </a:lnTo>
+                  <a:lnTo>
+                    <a:pt x="3964383" y="261064"/>
+                  </a:lnTo>
+                  <a:lnTo>
+                    <a:pt x="4048731" y="261064"/>
+                  </a:lnTo>
+                  <a:lnTo>
+                    <a:pt x="4048731" y="243398"/>
+                  </a:lnTo>
+                  <a:lnTo>
+                    <a:pt x="4133080" y="243398"/>
+                  </a:lnTo>
+                  <a:lnTo>
+                    <a:pt x="4133080" y="208441"/>
+                  </a:lnTo>
+                  <a:lnTo>
+                    <a:pt x="4217428" y="208441"/>
+                  </a:lnTo>
+                  <a:lnTo>
+                    <a:pt x="4217428" y="208441"/>
+                  </a:lnTo>
+                  <a:lnTo>
+                    <a:pt x="4301777" y="208441"/>
+                  </a:lnTo>
+                  <a:lnTo>
+                    <a:pt x="4301777" y="208441"/>
+                  </a:lnTo>
+                  <a:lnTo>
+                    <a:pt x="4386125" y="208441"/>
+                  </a:lnTo>
+                  <a:lnTo>
+                    <a:pt x="4386125" y="190905"/>
+                  </a:lnTo>
+                  <a:lnTo>
+                    <a:pt x="4470474" y="190905"/>
+                  </a:lnTo>
+                  <a:lnTo>
+                    <a:pt x="4470474" y="190905"/>
+                  </a:lnTo>
+                  <a:lnTo>
+                    <a:pt x="4554823" y="190905"/>
+                  </a:lnTo>
+                  <a:lnTo>
+                    <a:pt x="4554823" y="173423"/>
+                  </a:lnTo>
+                  <a:lnTo>
+                    <a:pt x="4639171" y="173423"/>
+                  </a:lnTo>
+                  <a:lnTo>
+                    <a:pt x="4639171" y="173423"/>
+                  </a:lnTo>
+                  <a:lnTo>
+                    <a:pt x="4723520" y="173423"/>
+                  </a:lnTo>
+                  <a:lnTo>
+                    <a:pt x="4723520" y="173423"/>
+                  </a:lnTo>
+                  <a:lnTo>
+                    <a:pt x="4807868" y="173423"/>
+                  </a:lnTo>
+                  <a:lnTo>
+                    <a:pt x="4807868" y="173423"/>
+                  </a:lnTo>
+                  <a:lnTo>
+                    <a:pt x="4892217" y="173423"/>
+                  </a:lnTo>
+                  <a:lnTo>
+                    <a:pt x="4892217" y="173423"/>
+                  </a:lnTo>
+                  <a:lnTo>
+                    <a:pt x="4976565" y="173423"/>
+                  </a:lnTo>
+                  <a:lnTo>
+                    <a:pt x="4976565" y="155970"/>
+                  </a:lnTo>
+                  <a:lnTo>
+                    <a:pt x="5060914" y="155970"/>
+                  </a:lnTo>
+                  <a:lnTo>
+                    <a:pt x="5060914" y="121402"/>
+                  </a:lnTo>
+                  <a:lnTo>
+                    <a:pt x="5145263" y="121402"/>
+                  </a:lnTo>
+                  <a:lnTo>
+                    <a:pt x="5145263" y="121402"/>
+                  </a:lnTo>
+                  <a:lnTo>
+                    <a:pt x="5229611" y="121402"/>
+                  </a:lnTo>
+                  <a:lnTo>
+                    <a:pt x="5229611" y="121402"/>
+                  </a:lnTo>
+                  <a:lnTo>
+                    <a:pt x="5313960" y="121402"/>
+                  </a:lnTo>
+                  <a:lnTo>
+                    <a:pt x="5313960" y="121402"/>
+                  </a:lnTo>
+                  <a:lnTo>
+                    <a:pt x="5398308" y="121402"/>
+                  </a:lnTo>
+                  <a:lnTo>
+                    <a:pt x="5398308" y="104144"/>
+                  </a:lnTo>
+                  <a:lnTo>
+                    <a:pt x="5482657" y="104144"/>
+                  </a:lnTo>
+                  <a:lnTo>
+                    <a:pt x="5482657" y="86974"/>
+                  </a:lnTo>
+                  <a:lnTo>
+                    <a:pt x="5567006" y="86974"/>
+                  </a:lnTo>
+                  <a:lnTo>
+                    <a:pt x="5567006" y="86974"/>
+                  </a:lnTo>
+                  <a:lnTo>
+                    <a:pt x="5651354" y="86974"/>
+                  </a:lnTo>
+                  <a:lnTo>
+                    <a:pt x="5651354" y="86974"/>
+                  </a:lnTo>
+                  <a:lnTo>
+                    <a:pt x="5735703" y="86974"/>
+                  </a:lnTo>
+                  <a:lnTo>
+                    <a:pt x="5735703" y="69779"/>
+                  </a:lnTo>
+                  <a:lnTo>
+                    <a:pt x="5820051" y="69779"/>
+                  </a:lnTo>
+                  <a:lnTo>
+                    <a:pt x="5820051" y="69779"/>
+                  </a:lnTo>
+                  <a:lnTo>
+                    <a:pt x="5904400" y="69779"/>
+                  </a:lnTo>
+                  <a:lnTo>
+                    <a:pt x="5904400" y="69779"/>
+                  </a:lnTo>
+                  <a:lnTo>
+                    <a:pt x="5988748" y="69779"/>
+                  </a:lnTo>
+                  <a:lnTo>
+                    <a:pt x="5988748" y="69779"/>
+                  </a:lnTo>
+                  <a:lnTo>
+                    <a:pt x="6073097" y="69779"/>
+                  </a:lnTo>
+                  <a:lnTo>
+                    <a:pt x="6073097" y="69779"/>
+                  </a:lnTo>
+                  <a:lnTo>
+                    <a:pt x="6157446" y="69779"/>
+                  </a:lnTo>
+                  <a:lnTo>
+                    <a:pt x="6157446" y="34895"/>
+                  </a:lnTo>
+                  <a:lnTo>
+                    <a:pt x="6241794" y="34895"/>
+                  </a:lnTo>
+                  <a:lnTo>
+                    <a:pt x="6241794" y="34895"/>
+                  </a:lnTo>
+                  <a:lnTo>
+                    <a:pt x="6326143" y="34895"/>
+                  </a:lnTo>
+                  <a:lnTo>
+                    <a:pt x="6326143" y="34895"/>
+                  </a:lnTo>
+                  <a:lnTo>
+                    <a:pt x="6410491" y="34895"/>
+                  </a:lnTo>
+                  <a:lnTo>
+                    <a:pt x="6410491" y="34895"/>
+                  </a:lnTo>
+                  <a:lnTo>
+                    <a:pt x="6494840" y="34895"/>
+                  </a:lnTo>
+                  <a:lnTo>
+                    <a:pt x="6494840" y="34895"/>
+                  </a:lnTo>
+                  <a:lnTo>
+                    <a:pt x="6579188" y="34895"/>
+                  </a:lnTo>
+                  <a:lnTo>
+                    <a:pt x="6579188" y="34895"/>
+                  </a:lnTo>
+                  <a:lnTo>
+                    <a:pt x="6663537" y="34895"/>
+                  </a:lnTo>
+                  <a:lnTo>
+                    <a:pt x="6663537" y="34895"/>
+                  </a:lnTo>
+                  <a:lnTo>
+                    <a:pt x="6747886" y="34895"/>
+                  </a:lnTo>
+                  <a:lnTo>
+                    <a:pt x="6747886" y="17407"/>
+                  </a:lnTo>
+                  <a:lnTo>
+                    <a:pt x="6832234" y="17407"/>
+                  </a:lnTo>
+                  <a:lnTo>
+                    <a:pt x="6832234" y="17407"/>
+                  </a:lnTo>
+                  <a:lnTo>
+                    <a:pt x="6916583" y="17407"/>
+                  </a:lnTo>
+                  <a:lnTo>
+                    <a:pt x="6916583" y="17407"/>
+                  </a:lnTo>
+                  <a:lnTo>
+                    <a:pt x="7000931" y="17407"/>
+                  </a:lnTo>
+                  <a:lnTo>
+                    <a:pt x="7000931" y="17407"/>
+                  </a:lnTo>
+                  <a:lnTo>
+                    <a:pt x="7085280" y="17407"/>
+                  </a:lnTo>
+                  <a:lnTo>
+                    <a:pt x="7085280" y="17407"/>
+                  </a:lnTo>
+                  <a:lnTo>
+                    <a:pt x="7169628" y="17407"/>
+                  </a:lnTo>
+                  <a:lnTo>
+                    <a:pt x="7169628" y="17407"/>
+                  </a:lnTo>
+                  <a:lnTo>
+                    <a:pt x="7253977" y="17407"/>
                   </a:lnTo>
                   <a:lnTo>
                     <a:pt x="7253977" y="0"/>
@@ -3531,528 +3531,528 @@
           </p:nvSpPr>
           <p:spPr>
             <a:xfrm>
-              <a:off x="1019512" y="3223122"/>
-              <a:ext cx="7591371" cy="1841772"/>
+              <a:off x="1019512" y="3714130"/>
+              <a:ext cx="7591371" cy="1350765"/>
             </a:xfrm>
             <a:custGeom>
               <a:avLst/>
               <a:pathLst>
-                <a:path w="7591371" h="1841772">
+                <a:path w="7591371" h="1350765">
                   <a:moveTo>
-                    <a:pt x="0" y="1841772"/>
+                    <a:pt x="0" y="1350765"/>
                   </a:moveTo>
                   <a:lnTo>
-                    <a:pt x="84348" y="1841772"/>
-                  </a:lnTo>
-                  <a:lnTo>
-                    <a:pt x="84348" y="1802499"/>
-                  </a:lnTo>
-                  <a:lnTo>
-                    <a:pt x="168697" y="1802499"/>
-                  </a:lnTo>
-                  <a:lnTo>
-                    <a:pt x="168697" y="1763359"/>
-                  </a:lnTo>
-                  <a:lnTo>
-                    <a:pt x="253045" y="1763359"/>
-                  </a:lnTo>
-                  <a:lnTo>
-                    <a:pt x="253045" y="1724227"/>
-                  </a:lnTo>
-                  <a:lnTo>
-                    <a:pt x="337394" y="1724227"/>
-                  </a:lnTo>
-                  <a:lnTo>
-                    <a:pt x="337394" y="1704540"/>
-                  </a:lnTo>
-                  <a:lnTo>
-                    <a:pt x="421742" y="1704540"/>
-                  </a:lnTo>
-                  <a:lnTo>
-                    <a:pt x="421742" y="1665385"/>
-                  </a:lnTo>
-                  <a:lnTo>
-                    <a:pt x="506091" y="1665385"/>
-                  </a:lnTo>
-                  <a:lnTo>
-                    <a:pt x="506091" y="1626410"/>
-                  </a:lnTo>
-                  <a:lnTo>
-                    <a:pt x="590440" y="1626410"/>
-                  </a:lnTo>
-                  <a:lnTo>
-                    <a:pt x="590440" y="1568359"/>
-                  </a:lnTo>
-                  <a:lnTo>
-                    <a:pt x="674788" y="1568359"/>
-                  </a:lnTo>
-                  <a:lnTo>
-                    <a:pt x="674788" y="1548900"/>
-                  </a:lnTo>
-                  <a:lnTo>
-                    <a:pt x="759137" y="1548900"/>
-                  </a:lnTo>
-                  <a:lnTo>
-                    <a:pt x="759137" y="1453191"/>
-                  </a:lnTo>
-                  <a:lnTo>
-                    <a:pt x="843485" y="1453191"/>
-                  </a:lnTo>
-                  <a:lnTo>
-                    <a:pt x="843485" y="1395524"/>
-                  </a:lnTo>
-                  <a:lnTo>
-                    <a:pt x="927834" y="1395524"/>
-                  </a:lnTo>
-                  <a:lnTo>
-                    <a:pt x="927834" y="1319111"/>
-                  </a:lnTo>
-                  <a:lnTo>
-                    <a:pt x="1012182" y="1319111"/>
-                  </a:lnTo>
-                  <a:lnTo>
-                    <a:pt x="1012182" y="1187870"/>
-                  </a:lnTo>
-                  <a:lnTo>
-                    <a:pt x="1096531" y="1187870"/>
-                  </a:lnTo>
-                  <a:lnTo>
-                    <a:pt x="1096531" y="1130756"/>
-                  </a:lnTo>
-                  <a:lnTo>
-                    <a:pt x="1180880" y="1130756"/>
-                  </a:lnTo>
-                  <a:lnTo>
-                    <a:pt x="1180880" y="1092430"/>
-                  </a:lnTo>
-                  <a:lnTo>
-                    <a:pt x="1265228" y="1092430"/>
-                  </a:lnTo>
-                  <a:lnTo>
-                    <a:pt x="1265228" y="1035548"/>
-                  </a:lnTo>
-                  <a:lnTo>
-                    <a:pt x="1349577" y="1035548"/>
-                  </a:lnTo>
-                  <a:lnTo>
-                    <a:pt x="1349577" y="997422"/>
-                  </a:lnTo>
-                  <a:lnTo>
-                    <a:pt x="1433925" y="997422"/>
-                  </a:lnTo>
-                  <a:lnTo>
-                    <a:pt x="1433925" y="959409"/>
-                  </a:lnTo>
-                  <a:lnTo>
-                    <a:pt x="1518274" y="959409"/>
-                  </a:lnTo>
-                  <a:lnTo>
-                    <a:pt x="1518274" y="884316"/>
-                  </a:lnTo>
-                  <a:lnTo>
-                    <a:pt x="1602622" y="884316"/>
-                  </a:lnTo>
-                  <a:lnTo>
-                    <a:pt x="1602622" y="865408"/>
-                  </a:lnTo>
-                  <a:lnTo>
-                    <a:pt x="1686971" y="865408"/>
-                  </a:lnTo>
-                  <a:lnTo>
-                    <a:pt x="1686971" y="846574"/>
-                  </a:lnTo>
-                  <a:lnTo>
-                    <a:pt x="1771320" y="846574"/>
-                  </a:lnTo>
-                  <a:lnTo>
-                    <a:pt x="1771320" y="846574"/>
-                  </a:lnTo>
-                  <a:lnTo>
-                    <a:pt x="1855668" y="846574"/>
-                  </a:lnTo>
-                  <a:lnTo>
-                    <a:pt x="1855668" y="771290"/>
-                  </a:lnTo>
-                  <a:lnTo>
-                    <a:pt x="1940017" y="771290"/>
-                  </a:lnTo>
-                  <a:lnTo>
-                    <a:pt x="1940017" y="771290"/>
-                  </a:lnTo>
-                  <a:lnTo>
-                    <a:pt x="2024365" y="771290"/>
-                  </a:lnTo>
-                  <a:lnTo>
-                    <a:pt x="2024365" y="752450"/>
-                  </a:lnTo>
-                  <a:lnTo>
-                    <a:pt x="2108714" y="752450"/>
-                  </a:lnTo>
-                  <a:lnTo>
-                    <a:pt x="2108714" y="715013"/>
-                  </a:lnTo>
-                  <a:lnTo>
-                    <a:pt x="2193062" y="715013"/>
-                  </a:lnTo>
-                  <a:lnTo>
-                    <a:pt x="2193062" y="641376"/>
-                  </a:lnTo>
-                  <a:lnTo>
-                    <a:pt x="2277411" y="641376"/>
-                  </a:lnTo>
-                  <a:lnTo>
-                    <a:pt x="2277411" y="622788"/>
-                  </a:lnTo>
-                  <a:lnTo>
-                    <a:pt x="2361760" y="622788"/>
-                  </a:lnTo>
-                  <a:lnTo>
-                    <a:pt x="2361760" y="549375"/>
-                  </a:lnTo>
-                  <a:lnTo>
-                    <a:pt x="2446108" y="549375"/>
-                  </a:lnTo>
-                  <a:lnTo>
-                    <a:pt x="2446108" y="494554"/>
-                  </a:lnTo>
-                  <a:lnTo>
-                    <a:pt x="2530457" y="494554"/>
-                  </a:lnTo>
-                  <a:lnTo>
-                    <a:pt x="2530457" y="440238"/>
-                  </a:lnTo>
-                  <a:lnTo>
-                    <a:pt x="2614805" y="440238"/>
-                  </a:lnTo>
-                  <a:lnTo>
-                    <a:pt x="2614805" y="422012"/>
-                  </a:lnTo>
-                  <a:lnTo>
-                    <a:pt x="2699154" y="422012"/>
-                  </a:lnTo>
-                  <a:lnTo>
-                    <a:pt x="2699154" y="422012"/>
-                  </a:lnTo>
-                  <a:lnTo>
-                    <a:pt x="2783503" y="422012"/>
-                  </a:lnTo>
-                  <a:lnTo>
-                    <a:pt x="2783503" y="422012"/>
-                  </a:lnTo>
-                  <a:lnTo>
-                    <a:pt x="2867851" y="422012"/>
-                  </a:lnTo>
-                  <a:lnTo>
-                    <a:pt x="2867851" y="368078"/>
-                  </a:lnTo>
-                  <a:lnTo>
-                    <a:pt x="2952200" y="368078"/>
-                  </a:lnTo>
-                  <a:lnTo>
-                    <a:pt x="2952200" y="332203"/>
-                  </a:lnTo>
-                  <a:lnTo>
-                    <a:pt x="3036548" y="332203"/>
-                  </a:lnTo>
-                  <a:lnTo>
-                    <a:pt x="3036548" y="332203"/>
-                  </a:lnTo>
-                  <a:lnTo>
-                    <a:pt x="3120897" y="332203"/>
-                  </a:lnTo>
-                  <a:lnTo>
-                    <a:pt x="3120897" y="314328"/>
-                  </a:lnTo>
-                  <a:lnTo>
-                    <a:pt x="3205245" y="314328"/>
-                  </a:lnTo>
-                  <a:lnTo>
-                    <a:pt x="3205245" y="296519"/>
-                  </a:lnTo>
-                  <a:lnTo>
-                    <a:pt x="3289594" y="296519"/>
-                  </a:lnTo>
-                  <a:lnTo>
-                    <a:pt x="3289594" y="296519"/>
-                  </a:lnTo>
-                  <a:lnTo>
-                    <a:pt x="3373943" y="296519"/>
-                  </a:lnTo>
-                  <a:lnTo>
-                    <a:pt x="3373943" y="296519"/>
-                  </a:lnTo>
-                  <a:lnTo>
-                    <a:pt x="3458291" y="296519"/>
-                  </a:lnTo>
-                  <a:lnTo>
-                    <a:pt x="3458291" y="296519"/>
-                  </a:lnTo>
-                  <a:lnTo>
-                    <a:pt x="3542640" y="296519"/>
-                  </a:lnTo>
-                  <a:lnTo>
-                    <a:pt x="3542640" y="296519"/>
-                  </a:lnTo>
-                  <a:lnTo>
-                    <a:pt x="3626988" y="296519"/>
-                  </a:lnTo>
-                  <a:lnTo>
-                    <a:pt x="3626988" y="296519"/>
-                  </a:lnTo>
-                  <a:lnTo>
-                    <a:pt x="3711337" y="296519"/>
-                  </a:lnTo>
-                  <a:lnTo>
-                    <a:pt x="3711337" y="296519"/>
-                  </a:lnTo>
-                  <a:lnTo>
-                    <a:pt x="3795685" y="296519"/>
-                  </a:lnTo>
-                  <a:lnTo>
-                    <a:pt x="3795685" y="278769"/>
-                  </a:lnTo>
-                  <a:lnTo>
-                    <a:pt x="3880034" y="278769"/>
-                  </a:lnTo>
-                  <a:lnTo>
-                    <a:pt x="3880034" y="278769"/>
-                  </a:lnTo>
-                  <a:lnTo>
-                    <a:pt x="3964383" y="278769"/>
-                  </a:lnTo>
-                  <a:lnTo>
-                    <a:pt x="3964383" y="261064"/>
-                  </a:lnTo>
-                  <a:lnTo>
-                    <a:pt x="4048731" y="261064"/>
-                  </a:lnTo>
-                  <a:lnTo>
-                    <a:pt x="4048731" y="243398"/>
-                  </a:lnTo>
-                  <a:lnTo>
-                    <a:pt x="4133080" y="243398"/>
-                  </a:lnTo>
-                  <a:lnTo>
-                    <a:pt x="4133080" y="208441"/>
-                  </a:lnTo>
-                  <a:lnTo>
-                    <a:pt x="4217428" y="208441"/>
-                  </a:lnTo>
-                  <a:lnTo>
-                    <a:pt x="4217428" y="208441"/>
-                  </a:lnTo>
-                  <a:lnTo>
-                    <a:pt x="4301777" y="208441"/>
-                  </a:lnTo>
-                  <a:lnTo>
-                    <a:pt x="4301777" y="208441"/>
-                  </a:lnTo>
-                  <a:lnTo>
-                    <a:pt x="4386125" y="208441"/>
-                  </a:lnTo>
-                  <a:lnTo>
-                    <a:pt x="4386125" y="190905"/>
-                  </a:lnTo>
-                  <a:lnTo>
-                    <a:pt x="4470474" y="190905"/>
-                  </a:lnTo>
-                  <a:lnTo>
-                    <a:pt x="4470474" y="190905"/>
-                  </a:lnTo>
-                  <a:lnTo>
-                    <a:pt x="4554823" y="190905"/>
-                  </a:lnTo>
-                  <a:lnTo>
-                    <a:pt x="4554823" y="173423"/>
-                  </a:lnTo>
-                  <a:lnTo>
-                    <a:pt x="4639171" y="173423"/>
-                  </a:lnTo>
-                  <a:lnTo>
-                    <a:pt x="4639171" y="173423"/>
-                  </a:lnTo>
-                  <a:lnTo>
-                    <a:pt x="4723520" y="173423"/>
-                  </a:lnTo>
-                  <a:lnTo>
-                    <a:pt x="4723520" y="173423"/>
-                  </a:lnTo>
-                  <a:lnTo>
-                    <a:pt x="4807868" y="173423"/>
-                  </a:lnTo>
-                  <a:lnTo>
-                    <a:pt x="4807868" y="173423"/>
-                  </a:lnTo>
-                  <a:lnTo>
-                    <a:pt x="4892217" y="173423"/>
-                  </a:lnTo>
-                  <a:lnTo>
-                    <a:pt x="4892217" y="173423"/>
-                  </a:lnTo>
-                  <a:lnTo>
-                    <a:pt x="4976565" y="173423"/>
-                  </a:lnTo>
-                  <a:lnTo>
-                    <a:pt x="4976565" y="155970"/>
-                  </a:lnTo>
-                  <a:lnTo>
-                    <a:pt x="5060914" y="155970"/>
-                  </a:lnTo>
-                  <a:lnTo>
-                    <a:pt x="5060914" y="121402"/>
-                  </a:lnTo>
-                  <a:lnTo>
-                    <a:pt x="5145263" y="121402"/>
-                  </a:lnTo>
-                  <a:lnTo>
-                    <a:pt x="5145263" y="121402"/>
-                  </a:lnTo>
-                  <a:lnTo>
-                    <a:pt x="5229611" y="121402"/>
-                  </a:lnTo>
-                  <a:lnTo>
-                    <a:pt x="5229611" y="121402"/>
-                  </a:lnTo>
-                  <a:lnTo>
-                    <a:pt x="5313960" y="121402"/>
-                  </a:lnTo>
-                  <a:lnTo>
-                    <a:pt x="5313960" y="121402"/>
-                  </a:lnTo>
-                  <a:lnTo>
-                    <a:pt x="5398308" y="121402"/>
-                  </a:lnTo>
-                  <a:lnTo>
-                    <a:pt x="5398308" y="104144"/>
-                  </a:lnTo>
-                  <a:lnTo>
-                    <a:pt x="5482657" y="104144"/>
-                  </a:lnTo>
-                  <a:lnTo>
-                    <a:pt x="5482657" y="86974"/>
-                  </a:lnTo>
-                  <a:lnTo>
-                    <a:pt x="5567006" y="86974"/>
-                  </a:lnTo>
-                  <a:lnTo>
-                    <a:pt x="5567006" y="86974"/>
-                  </a:lnTo>
-                  <a:lnTo>
-                    <a:pt x="5651354" y="86974"/>
-                  </a:lnTo>
-                  <a:lnTo>
-                    <a:pt x="5651354" y="86974"/>
-                  </a:lnTo>
-                  <a:lnTo>
-                    <a:pt x="5735703" y="86974"/>
-                  </a:lnTo>
-                  <a:lnTo>
-                    <a:pt x="5735703" y="69779"/>
-                  </a:lnTo>
-                  <a:lnTo>
-                    <a:pt x="5820051" y="69779"/>
-                  </a:lnTo>
-                  <a:lnTo>
-                    <a:pt x="5820051" y="69779"/>
-                  </a:lnTo>
-                  <a:lnTo>
-                    <a:pt x="5904400" y="69779"/>
-                  </a:lnTo>
-                  <a:lnTo>
-                    <a:pt x="5904400" y="69779"/>
-                  </a:lnTo>
-                  <a:lnTo>
-                    <a:pt x="5988748" y="69779"/>
-                  </a:lnTo>
-                  <a:lnTo>
-                    <a:pt x="5988748" y="69779"/>
-                  </a:lnTo>
-                  <a:lnTo>
-                    <a:pt x="6073097" y="69779"/>
-                  </a:lnTo>
-                  <a:lnTo>
-                    <a:pt x="6073097" y="69779"/>
-                  </a:lnTo>
-                  <a:lnTo>
-                    <a:pt x="6157446" y="69779"/>
-                  </a:lnTo>
-                  <a:lnTo>
-                    <a:pt x="6157446" y="34895"/>
-                  </a:lnTo>
-                  <a:lnTo>
-                    <a:pt x="6241794" y="34895"/>
-                  </a:lnTo>
-                  <a:lnTo>
-                    <a:pt x="6241794" y="34895"/>
-                  </a:lnTo>
-                  <a:lnTo>
-                    <a:pt x="6326143" y="34895"/>
-                  </a:lnTo>
-                  <a:lnTo>
-                    <a:pt x="6326143" y="34895"/>
-                  </a:lnTo>
-                  <a:lnTo>
-                    <a:pt x="6410491" y="34895"/>
-                  </a:lnTo>
-                  <a:lnTo>
-                    <a:pt x="6410491" y="34895"/>
-                  </a:lnTo>
-                  <a:lnTo>
-                    <a:pt x="6494840" y="34895"/>
-                  </a:lnTo>
-                  <a:lnTo>
-                    <a:pt x="6494840" y="34895"/>
-                  </a:lnTo>
-                  <a:lnTo>
-                    <a:pt x="6579188" y="34895"/>
-                  </a:lnTo>
-                  <a:lnTo>
-                    <a:pt x="6579188" y="34895"/>
-                  </a:lnTo>
-                  <a:lnTo>
-                    <a:pt x="6663537" y="34895"/>
-                  </a:lnTo>
-                  <a:lnTo>
-                    <a:pt x="6663537" y="34895"/>
-                  </a:lnTo>
-                  <a:lnTo>
-                    <a:pt x="6747886" y="34895"/>
-                  </a:lnTo>
-                  <a:lnTo>
-                    <a:pt x="6747886" y="17407"/>
-                  </a:lnTo>
-                  <a:lnTo>
-                    <a:pt x="6832234" y="17407"/>
-                  </a:lnTo>
-                  <a:lnTo>
-                    <a:pt x="6832234" y="17407"/>
-                  </a:lnTo>
-                  <a:lnTo>
-                    <a:pt x="6916583" y="17407"/>
-                  </a:lnTo>
-                  <a:lnTo>
-                    <a:pt x="6916583" y="17407"/>
-                  </a:lnTo>
-                  <a:lnTo>
-                    <a:pt x="7000931" y="17407"/>
-                  </a:lnTo>
-                  <a:lnTo>
-                    <a:pt x="7000931" y="17407"/>
-                  </a:lnTo>
-                  <a:lnTo>
-                    <a:pt x="7085280" y="17407"/>
-                  </a:lnTo>
-                  <a:lnTo>
-                    <a:pt x="7085280" y="17407"/>
-                  </a:lnTo>
-                  <a:lnTo>
-                    <a:pt x="7169628" y="17407"/>
-                  </a:lnTo>
-                  <a:lnTo>
-                    <a:pt x="7169628" y="17407"/>
-                  </a:lnTo>
-                  <a:lnTo>
-                    <a:pt x="7253977" y="17407"/>
+                    <a:pt x="84348" y="1350765"/>
+                  </a:lnTo>
+                  <a:lnTo>
+                    <a:pt x="84348" y="1325335"/>
+                  </a:lnTo>
+                  <a:lnTo>
+                    <a:pt x="168697" y="1325335"/>
+                  </a:lnTo>
+                  <a:lnTo>
+                    <a:pt x="168697" y="1299885"/>
+                  </a:lnTo>
+                  <a:lnTo>
+                    <a:pt x="253045" y="1299885"/>
+                  </a:lnTo>
+                  <a:lnTo>
+                    <a:pt x="253045" y="1274331"/>
+                  </a:lnTo>
+                  <a:lnTo>
+                    <a:pt x="337394" y="1274331"/>
+                  </a:lnTo>
+                  <a:lnTo>
+                    <a:pt x="337394" y="1261434"/>
+                  </a:lnTo>
+                  <a:lnTo>
+                    <a:pt x="421742" y="1261434"/>
+                  </a:lnTo>
+                  <a:lnTo>
+                    <a:pt x="421742" y="1235699"/>
+                  </a:lnTo>
+                  <a:lnTo>
+                    <a:pt x="506091" y="1235699"/>
+                  </a:lnTo>
+                  <a:lnTo>
+                    <a:pt x="506091" y="1209971"/>
+                  </a:lnTo>
+                  <a:lnTo>
+                    <a:pt x="590440" y="1209971"/>
+                  </a:lnTo>
+                  <a:lnTo>
+                    <a:pt x="590440" y="1171437"/>
+                  </a:lnTo>
+                  <a:lnTo>
+                    <a:pt x="674788" y="1171437"/>
+                  </a:lnTo>
+                  <a:lnTo>
+                    <a:pt x="674788" y="1158462"/>
+                  </a:lnTo>
+                  <a:lnTo>
+                    <a:pt x="759137" y="1158462"/>
+                  </a:lnTo>
+                  <a:lnTo>
+                    <a:pt x="759137" y="1094214"/>
+                  </a:lnTo>
+                  <a:lnTo>
+                    <a:pt x="843485" y="1094214"/>
+                  </a:lnTo>
+                  <a:lnTo>
+                    <a:pt x="843485" y="1055146"/>
+                  </a:lnTo>
+                  <a:lnTo>
+                    <a:pt x="927834" y="1055146"/>
+                  </a:lnTo>
+                  <a:lnTo>
+                    <a:pt x="927834" y="1002950"/>
+                  </a:lnTo>
+                  <a:lnTo>
+                    <a:pt x="1012182" y="1002950"/>
+                  </a:lnTo>
+                  <a:lnTo>
+                    <a:pt x="1012182" y="912115"/>
+                  </a:lnTo>
+                  <a:lnTo>
+                    <a:pt x="1096531" y="912115"/>
+                  </a:lnTo>
+                  <a:lnTo>
+                    <a:pt x="1096531" y="872095"/>
+                  </a:lnTo>
+                  <a:lnTo>
+                    <a:pt x="1180880" y="872095"/>
+                  </a:lnTo>
+                  <a:lnTo>
+                    <a:pt x="1180880" y="845067"/>
+                  </a:lnTo>
+                  <a:lnTo>
+                    <a:pt x="1265228" y="845067"/>
+                  </a:lnTo>
+                  <a:lnTo>
+                    <a:pt x="1265228" y="804690"/>
+                  </a:lnTo>
+                  <a:lnTo>
+                    <a:pt x="1349577" y="804690"/>
+                  </a:lnTo>
+                  <a:lnTo>
+                    <a:pt x="1349577" y="777446"/>
+                  </a:lnTo>
+                  <a:lnTo>
+                    <a:pt x="1433925" y="777446"/>
+                  </a:lnTo>
+                  <a:lnTo>
+                    <a:pt x="1433925" y="750137"/>
+                  </a:lnTo>
+                  <a:lnTo>
+                    <a:pt x="1518274" y="750137"/>
+                  </a:lnTo>
+                  <a:lnTo>
+                    <a:pt x="1518274" y="695741"/>
+                  </a:lnTo>
+                  <a:lnTo>
+                    <a:pt x="1602622" y="695741"/>
+                  </a:lnTo>
+                  <a:lnTo>
+                    <a:pt x="1602622" y="681950"/>
+                  </a:lnTo>
+                  <a:lnTo>
+                    <a:pt x="1686971" y="681950"/>
+                  </a:lnTo>
+                  <a:lnTo>
+                    <a:pt x="1686971" y="668174"/>
+                  </a:lnTo>
+                  <a:lnTo>
+                    <a:pt x="1771320" y="668174"/>
+                  </a:lnTo>
+                  <a:lnTo>
+                    <a:pt x="1771320" y="668174"/>
+                  </a:lnTo>
+                  <a:lnTo>
+                    <a:pt x="1855668" y="668174"/>
+                  </a:lnTo>
+                  <a:lnTo>
+                    <a:pt x="1855668" y="612708"/>
+                  </a:lnTo>
+                  <a:lnTo>
+                    <a:pt x="1940017" y="612708"/>
+                  </a:lnTo>
+                  <a:lnTo>
+                    <a:pt x="1940017" y="612708"/>
+                  </a:lnTo>
+                  <a:lnTo>
+                    <a:pt x="2024365" y="612708"/>
+                  </a:lnTo>
+                  <a:lnTo>
+                    <a:pt x="2024365" y="598726"/>
+                  </a:lnTo>
+                  <a:lnTo>
+                    <a:pt x="2108714" y="598726"/>
+                  </a:lnTo>
+                  <a:lnTo>
+                    <a:pt x="2108714" y="570818"/>
+                  </a:lnTo>
+                  <a:lnTo>
+                    <a:pt x="2193062" y="570818"/>
+                  </a:lnTo>
+                  <a:lnTo>
+                    <a:pt x="2193062" y="515432"/>
+                  </a:lnTo>
+                  <a:lnTo>
+                    <a:pt x="2277411" y="515432"/>
+                  </a:lnTo>
+                  <a:lnTo>
+                    <a:pt x="2277411" y="501344"/>
+                  </a:lnTo>
+                  <a:lnTo>
+                    <a:pt x="2361760" y="501344"/>
+                  </a:lnTo>
+                  <a:lnTo>
+                    <a:pt x="2361760" y="445272"/>
+                  </a:lnTo>
+                  <a:lnTo>
+                    <a:pt x="2446108" y="445272"/>
+                  </a:lnTo>
+                  <a:lnTo>
+                    <a:pt x="2446108" y="402933"/>
+                  </a:lnTo>
+                  <a:lnTo>
+                    <a:pt x="2530457" y="402933"/>
+                  </a:lnTo>
+                  <a:lnTo>
+                    <a:pt x="2530457" y="360576"/>
+                  </a:lnTo>
+                  <a:lnTo>
+                    <a:pt x="2614805" y="360576"/>
+                  </a:lnTo>
+                  <a:lnTo>
+                    <a:pt x="2614805" y="346268"/>
+                  </a:lnTo>
+                  <a:lnTo>
+                    <a:pt x="2699154" y="346268"/>
+                  </a:lnTo>
+                  <a:lnTo>
+                    <a:pt x="2699154" y="346268"/>
+                  </a:lnTo>
+                  <a:lnTo>
+                    <a:pt x="2783503" y="346268"/>
+                  </a:lnTo>
+                  <a:lnTo>
+                    <a:pt x="2783503" y="346268"/>
+                  </a:lnTo>
+                  <a:lnTo>
+                    <a:pt x="2867851" y="346268"/>
+                  </a:lnTo>
+                  <a:lnTo>
+                    <a:pt x="2867851" y="303644"/>
+                  </a:lnTo>
+                  <a:lnTo>
+                    <a:pt x="2952200" y="303644"/>
+                  </a:lnTo>
+                  <a:lnTo>
+                    <a:pt x="2952200" y="275049"/>
+                  </a:lnTo>
+                  <a:lnTo>
+                    <a:pt x="3036548" y="275049"/>
+                  </a:lnTo>
+                  <a:lnTo>
+                    <a:pt x="3036548" y="275049"/>
+                  </a:lnTo>
+                  <a:lnTo>
+                    <a:pt x="3120897" y="275049"/>
+                  </a:lnTo>
+                  <a:lnTo>
+                    <a:pt x="3120897" y="260728"/>
+                  </a:lnTo>
+                  <a:lnTo>
+                    <a:pt x="3205245" y="260728"/>
+                  </a:lnTo>
+                  <a:lnTo>
+                    <a:pt x="3205245" y="246410"/>
+                  </a:lnTo>
+                  <a:lnTo>
+                    <a:pt x="3289594" y="246410"/>
+                  </a:lnTo>
+                  <a:lnTo>
+                    <a:pt x="3289594" y="246410"/>
+                  </a:lnTo>
+                  <a:lnTo>
+                    <a:pt x="3373943" y="246410"/>
+                  </a:lnTo>
+                  <a:lnTo>
+                    <a:pt x="3373943" y="246410"/>
+                  </a:lnTo>
+                  <a:lnTo>
+                    <a:pt x="3458291" y="246410"/>
+                  </a:lnTo>
+                  <a:lnTo>
+                    <a:pt x="3458291" y="246410"/>
+                  </a:lnTo>
+                  <a:lnTo>
+                    <a:pt x="3542640" y="246410"/>
+                  </a:lnTo>
+                  <a:lnTo>
+                    <a:pt x="3542640" y="246410"/>
+                  </a:lnTo>
+                  <a:lnTo>
+                    <a:pt x="3626988" y="246410"/>
+                  </a:lnTo>
+                  <a:lnTo>
+                    <a:pt x="3626988" y="246410"/>
+                  </a:lnTo>
+                  <a:lnTo>
+                    <a:pt x="3711337" y="246410"/>
+                  </a:lnTo>
+                  <a:lnTo>
+                    <a:pt x="3711337" y="246410"/>
+                  </a:lnTo>
+                  <a:lnTo>
+                    <a:pt x="3795685" y="246410"/>
+                  </a:lnTo>
+                  <a:lnTo>
+                    <a:pt x="3795685" y="232088"/>
+                  </a:lnTo>
+                  <a:lnTo>
+                    <a:pt x="3880034" y="232088"/>
+                  </a:lnTo>
+                  <a:lnTo>
+                    <a:pt x="3880034" y="232088"/>
+                  </a:lnTo>
+                  <a:lnTo>
+                    <a:pt x="3964383" y="232088"/>
+                  </a:lnTo>
+                  <a:lnTo>
+                    <a:pt x="3964383" y="217753"/>
+                  </a:lnTo>
+                  <a:lnTo>
+                    <a:pt x="4048731" y="217753"/>
+                  </a:lnTo>
+                  <a:lnTo>
+                    <a:pt x="4048731" y="203397"/>
+                  </a:lnTo>
+                  <a:lnTo>
+                    <a:pt x="4133080" y="203397"/>
+                  </a:lnTo>
+                  <a:lnTo>
+                    <a:pt x="4133080" y="174837"/>
+                  </a:lnTo>
+                  <a:lnTo>
+                    <a:pt x="4217428" y="174837"/>
+                  </a:lnTo>
+                  <a:lnTo>
+                    <a:pt x="4217428" y="174837"/>
+                  </a:lnTo>
+                  <a:lnTo>
+                    <a:pt x="4301777" y="174837"/>
+                  </a:lnTo>
+                  <a:lnTo>
+                    <a:pt x="4301777" y="174837"/>
+                  </a:lnTo>
+                  <a:lnTo>
+                    <a:pt x="4386125" y="174837"/>
+                  </a:lnTo>
+                  <a:lnTo>
+                    <a:pt x="4386125" y="160432"/>
+                  </a:lnTo>
+                  <a:lnTo>
+                    <a:pt x="4470474" y="160432"/>
+                  </a:lnTo>
+                  <a:lnTo>
+                    <a:pt x="4470474" y="160432"/>
+                  </a:lnTo>
+                  <a:lnTo>
+                    <a:pt x="4554823" y="160432"/>
+                  </a:lnTo>
+                  <a:lnTo>
+                    <a:pt x="4554823" y="146019"/>
+                  </a:lnTo>
+                  <a:lnTo>
+                    <a:pt x="4639171" y="146019"/>
+                  </a:lnTo>
+                  <a:lnTo>
+                    <a:pt x="4639171" y="146019"/>
+                  </a:lnTo>
+                  <a:lnTo>
+                    <a:pt x="4723520" y="146019"/>
+                  </a:lnTo>
+                  <a:lnTo>
+                    <a:pt x="4723520" y="146019"/>
+                  </a:lnTo>
+                  <a:lnTo>
+                    <a:pt x="4807868" y="146019"/>
+                  </a:lnTo>
+                  <a:lnTo>
+                    <a:pt x="4807868" y="146019"/>
+                  </a:lnTo>
+                  <a:lnTo>
+                    <a:pt x="4892217" y="146019"/>
+                  </a:lnTo>
+                  <a:lnTo>
+                    <a:pt x="4892217" y="146019"/>
+                  </a:lnTo>
+                  <a:lnTo>
+                    <a:pt x="4976565" y="146019"/>
+                  </a:lnTo>
+                  <a:lnTo>
+                    <a:pt x="4976565" y="131576"/>
+                  </a:lnTo>
+                  <a:lnTo>
+                    <a:pt x="5060914" y="131576"/>
+                  </a:lnTo>
+                  <a:lnTo>
+                    <a:pt x="5060914" y="102809"/>
+                  </a:lnTo>
+                  <a:lnTo>
+                    <a:pt x="5145263" y="102809"/>
+                  </a:lnTo>
+                  <a:lnTo>
+                    <a:pt x="5145263" y="102809"/>
+                  </a:lnTo>
+                  <a:lnTo>
+                    <a:pt x="5229611" y="102809"/>
+                  </a:lnTo>
+                  <a:lnTo>
+                    <a:pt x="5229611" y="102809"/>
+                  </a:lnTo>
+                  <a:lnTo>
+                    <a:pt x="5313960" y="102809"/>
+                  </a:lnTo>
+                  <a:lnTo>
+                    <a:pt x="5313960" y="102809"/>
+                  </a:lnTo>
+                  <a:lnTo>
+                    <a:pt x="5398308" y="102809"/>
+                  </a:lnTo>
+                  <a:lnTo>
+                    <a:pt x="5398308" y="88365"/>
+                  </a:lnTo>
+                  <a:lnTo>
+                    <a:pt x="5482657" y="88365"/>
+                  </a:lnTo>
+                  <a:lnTo>
+                    <a:pt x="5482657" y="73941"/>
+                  </a:lnTo>
+                  <a:lnTo>
+                    <a:pt x="5567006" y="73941"/>
+                  </a:lnTo>
+                  <a:lnTo>
+                    <a:pt x="5567006" y="73941"/>
+                  </a:lnTo>
+                  <a:lnTo>
+                    <a:pt x="5651354" y="73941"/>
+                  </a:lnTo>
+                  <a:lnTo>
+                    <a:pt x="5651354" y="73941"/>
+                  </a:lnTo>
+                  <a:lnTo>
+                    <a:pt x="5735703" y="73941"/>
+                  </a:lnTo>
+                  <a:lnTo>
+                    <a:pt x="5735703" y="59439"/>
+                  </a:lnTo>
+                  <a:lnTo>
+                    <a:pt x="5820051" y="59439"/>
+                  </a:lnTo>
+                  <a:lnTo>
+                    <a:pt x="5820051" y="59439"/>
+                  </a:lnTo>
+                  <a:lnTo>
+                    <a:pt x="5904400" y="59439"/>
+                  </a:lnTo>
+                  <a:lnTo>
+                    <a:pt x="5904400" y="59439"/>
+                  </a:lnTo>
+                  <a:lnTo>
+                    <a:pt x="5988748" y="59439"/>
+                  </a:lnTo>
+                  <a:lnTo>
+                    <a:pt x="5988748" y="59439"/>
+                  </a:lnTo>
+                  <a:lnTo>
+                    <a:pt x="6073097" y="59439"/>
+                  </a:lnTo>
+                  <a:lnTo>
+                    <a:pt x="6073097" y="59439"/>
+                  </a:lnTo>
+                  <a:lnTo>
+                    <a:pt x="6157446" y="59439"/>
+                  </a:lnTo>
+                  <a:lnTo>
+                    <a:pt x="6157446" y="29844"/>
+                  </a:lnTo>
+                  <a:lnTo>
+                    <a:pt x="6241794" y="29844"/>
+                  </a:lnTo>
+                  <a:lnTo>
+                    <a:pt x="6241794" y="29844"/>
+                  </a:lnTo>
+                  <a:lnTo>
+                    <a:pt x="6326143" y="29844"/>
+                  </a:lnTo>
+                  <a:lnTo>
+                    <a:pt x="6326143" y="29844"/>
+                  </a:lnTo>
+                  <a:lnTo>
+                    <a:pt x="6410491" y="29844"/>
+                  </a:lnTo>
+                  <a:lnTo>
+                    <a:pt x="6410491" y="29844"/>
+                  </a:lnTo>
+                  <a:lnTo>
+                    <a:pt x="6494840" y="29844"/>
+                  </a:lnTo>
+                  <a:lnTo>
+                    <a:pt x="6494840" y="29844"/>
+                  </a:lnTo>
+                  <a:lnTo>
+                    <a:pt x="6579188" y="29844"/>
+                  </a:lnTo>
+                  <a:lnTo>
+                    <a:pt x="6579188" y="29844"/>
+                  </a:lnTo>
+                  <a:lnTo>
+                    <a:pt x="6663537" y="29844"/>
+                  </a:lnTo>
+                  <a:lnTo>
+                    <a:pt x="6663537" y="29844"/>
+                  </a:lnTo>
+                  <a:lnTo>
+                    <a:pt x="6747886" y="29844"/>
+                  </a:lnTo>
+                  <a:lnTo>
+                    <a:pt x="6747886" y="14918"/>
+                  </a:lnTo>
+                  <a:lnTo>
+                    <a:pt x="6832234" y="14918"/>
+                  </a:lnTo>
+                  <a:lnTo>
+                    <a:pt x="6832234" y="14918"/>
+                  </a:lnTo>
+                  <a:lnTo>
+                    <a:pt x="6916583" y="14918"/>
+                  </a:lnTo>
+                  <a:lnTo>
+                    <a:pt x="6916583" y="14918"/>
+                  </a:lnTo>
+                  <a:lnTo>
+                    <a:pt x="7000931" y="14918"/>
+                  </a:lnTo>
+                  <a:lnTo>
+                    <a:pt x="7000931" y="14918"/>
+                  </a:lnTo>
+                  <a:lnTo>
+                    <a:pt x="7085280" y="14918"/>
+                  </a:lnTo>
+                  <a:lnTo>
+                    <a:pt x="7085280" y="14918"/>
+                  </a:lnTo>
+                  <a:lnTo>
+                    <a:pt x="7169628" y="14918"/>
+                  </a:lnTo>
+                  <a:lnTo>
+                    <a:pt x="7169628" y="14918"/>
+                  </a:lnTo>
+                  <a:lnTo>
+                    <a:pt x="7253977" y="14918"/>
                   </a:lnTo>
                   <a:lnTo>
                     <a:pt x="7253977" y="0"/>
@@ -4527,8 +4527,8 @@
           </p:nvSpPr>
           <p:spPr>
             <a:xfrm>
-              <a:off x="4103887" y="5285568"/>
-              <a:ext cx="1422623" cy="109362"/>
+              <a:off x="3777811" y="5285568"/>
+              <a:ext cx="2074773" cy="109362"/>
             </a:xfrm>
             <a:prstGeom prst="rect">
               <a:avLst/>
@@ -4560,7 +4560,7 @@
                   <a:latin typeface="Helvetica"/>
                   <a:cs typeface="Helvetica"/>
                 </a:rPr>
-                <a:t>Days from admission</a:t>
+                <a:t>Days from terlipressin initiation</a:t>
               </a:r>
             </a:p>
           </p:txBody>
